--- a/NorthBridge_Capstone_Project_Overview.pptx
+++ b/NorthBridge_Capstone_Project_Overview.pptx
@@ -3657,7 +3657,7 @@
                 </a:solidFill>
                 <a:latin typeface="Calibri"/>
               </a:rPr>
-              <a:t>Gen AI for Business  |  Executive MBA Capstone  |  Devyani Varati</a:t>
+              <a:t>Gen AI for Business  |  Executive MBA Capstone  |  Devyani Varati (Camarushy)</a:t>
             </a:r>
           </a:p>
         </p:txBody>
